--- a/brain/library/internal/one-pagers/Home Health Agency Software April 2026.pptx
+++ b/brain/library/internal/one-pagers/Home Health Agency Software April 2026.pptx
@@ -17453,7 +17453,12 @@
                     </a:solidFill>
                   </a:tcPr>
                 </a:tc>
-                <a:tc hMerge="1"/>
+                <a:tc hMerge="1">
+                  <a:txBody>
+                    <a:bodyPr/>
+                    <a:p/>
+                  </a:txBody>
+                </a:tc>
               </a:tr>
               <a:tr h="381225">
                 <a:tc>
@@ -17751,7 +17756,12 @@
                     </a:solidFill>
                   </a:tcPr>
                 </a:tc>
-                <a:tc hMerge="1"/>
+                <a:tc hMerge="1">
+                  <a:txBody>
+                    <a:bodyPr/>
+                    <a:p/>
+                  </a:txBody>
+                </a:tc>
               </a:tr>
               <a:tr h="127000">
                 <a:tc gridSpan="2">
@@ -17880,7 +17890,12 @@
                     </a:solidFill>
                   </a:tcPr>
                 </a:tc>
-                <a:tc hMerge="1"/>
+                <a:tc hMerge="1">
+                  <a:txBody>
+                    <a:bodyPr/>
+                    <a:p/>
+                  </a:txBody>
+                </a:tc>
               </a:tr>
             </a:tbl>
           </a:graphicData>

--- a/brain/library/internal/one-pagers/Home Health Agency Software April 2026.pptx
+++ b/brain/library/internal/one-pagers/Home Health Agency Software April 2026.pptx
@@ -15093,7 +15093,7 @@
                     <a:bodyPr/>
                     <a:p>
                       <a:r>
-                        <a:t>Pending Scoring</a:t>
+                        <a:t>2.51 / 3.0 (84%)</a:t>
                       </a:r>
                     </a:p>
                   </a:txBody>
